--- a/docs/nereid-defense.pptx
+++ b/docs/nereid-defense.pptx
@@ -4891,7 +4891,7 @@
                           </a:solidFill>
                           <a:latin typeface="Noto Sans CJK SC"/>
                         </a:rPr>
-                        <a:t>8 worker 10+ 维 / 准确率 100%·召回 92.2%</a:t>
+                        <a:t>8 worker 10+ 维 / 准确率 99.2%·召回 100%</a:t>
                       </a:r>
                     </a:p>
                   </a:txBody>
@@ -8882,7 +8882,7 @@
                 </a:solidFill>
                 <a:latin typeface="Noto Sans CJK SC"/>
               </a:rPr>
-              <a:t>字段级准确率 100% · 召回 92.2%（n=30 分层随机，三源真值逐条比对）· vuln 富化覆盖 100%</a:t>
+              <a:t>字段级准确率 99.2% · 召回 100%（n=30 分层随机，三源真值逐条比对）· vuln 富化覆盖 100%</a:t>
             </a:r>
           </a:p>
           <a:p>

--- a/docs/nereid-defense.pptx
+++ b/docs/nereid-defense.pptx
@@ -1005,7 +1005,7 @@
           <a:lstStyle/>
           <a:p>
             <a:r>
-              <a:t>四层结构：表现层六个界面，编排层三种图拓扑，能力层四大模块，底座四存储。数字全部是 2026-10-18 实测快照。</a:t>
+              <a:t>四层结构：表现层六个界面，编排层三种图拓扑，能力层四大模块，底座四存储。数字全部是 2026-10-19 实测快照。</a:t>
             </a:r>
           </a:p>
         </p:txBody>
@@ -4959,7 +4959,7 @@
                           </a:solidFill>
                           <a:latin typeface="Noto Sans CJK SC"/>
                         </a:rPr>
-                        <a:t>多跳 100%·整体 100%·快路径 3.2s·深度 p50 8.9s</a:t>
+                        <a:t>多跳 95.8%·整体 97.9%·快路径 3.2s·深度 p50 8.9s</a:t>
                       </a:r>
                     </a:p>
                   </a:txBody>
@@ -5027,7 +5027,7 @@
                           </a:solidFill>
                           <a:latin typeface="Noto Sans CJK SC"/>
                         </a:rPr>
-                        <a:t>45,034 情报 / 29,134 KG 节点 / 58,471 边</a:t>
+                        <a:t>50,277 情报 / 52,844 KG 节点 / 84,735 边</a:t>
                       </a:r>
                     </a:p>
                   </a:txBody>
@@ -6839,7 +6839,7 @@
                 </a:solidFill>
                 <a:latin typeface="Noto Sans CJK SC"/>
               </a:rPr>
-              <a:t>PG checkpointer 断点续跑，生产级编排</a:t>
+              <a:t>PG checkpointer 断点续跑（resume API 可演示），生产级编排</a:t>
             </a:r>
           </a:p>
         </p:txBody>
@@ -7625,7 +7625,7 @@
                 </a:solidFill>
                 <a:latin typeface="Noto Sans CJK SC"/>
               </a:rPr>
-              <a:t>Next.js 大屏 / 情报卡 / 图谱探索 / 深度问答 / 为你推荐 / 报告</a:t>
+              <a:t>Next.js 值班台工作台 / 情报检索 / 图谱探索 / 深度问答 / 为你推荐 / 报告</a:t>
             </a:r>
           </a:p>
         </p:txBody>
@@ -7886,7 +7886,7 @@
                 </a:solidFill>
                 <a:latin typeface="Noto Sans CJK SC"/>
               </a:rPr>
-              <a:t>45,034 条情报 · 29,134 图谱节点 · 58,471 边 · 全流程无人值守</a:t>
+              <a:t>50,277 条情报 · 52,844 图谱节点 · 84,735 边 · 全流程无人值守</a:t>
             </a:r>
           </a:p>
         </p:txBody>
@@ -9177,7 +9177,7 @@
                           </a:solidFill>
                           <a:latin typeface="Noto Sans CJK SC"/>
                         </a:rPr>
-                        <a:t>100%（12 题自建集 live）</a:t>
+                        <a:t>97.9%（12 题自建集 live）</a:t>
                       </a:r>
                     </a:p>
                   </a:txBody>
@@ -9223,7 +9223,7 @@
                           </a:solidFill>
                           <a:latin typeface="Noto Sans CJK SC"/>
                         </a:rPr>
-                        <a:t>100%</a:t>
+                        <a:t>95.8%</a:t>
                       </a:r>
                     </a:p>
                   </a:txBody>
@@ -9998,7 +9998,7 @@
                 </a:solidFill>
                 <a:latin typeface="Noto Sans CJK SC"/>
               </a:rPr>
-              <a:t>PostgreSQL checkpointer durable execution（7 checkpoint/run，崩溃后同 thread_id 断点续跑）</a:t>
+              <a:t>PostgreSQL checkpointer durable execution（崩溃后 POST /api/pipeline/resume/{run_id} 断点续跑，可现场演示）</a:t>
             </a:r>
           </a:p>
           <a:p>
@@ -10014,7 +10014,7 @@
                 </a:solidFill>
                 <a:latin typeface="Noto Sans CJK SC"/>
               </a:rPr>
-              <a:t>HITL 复核队列 confirm/reject 闭环 · handoff 弹跳预算 · worker 只回结论防上下文膨胀</a:t>
+              <a:t>HITL 复核队列 confirm/reject/undo 闭环 · handoff 弹跳预算 · worker 只回结论防上下文膨胀</a:t>
             </a:r>
           </a:p>
         </p:txBody>
@@ -10217,7 +10217,7 @@
                 </a:solidFill>
                 <a:latin typeface="Noto Sans CJK SC"/>
               </a:rPr>
-              <a:t>MITRE ATLAS 成熟度三级标注</a:t>
+              <a:t>ATT&amp;CK/ATLAS 双框架技术映射</a:t>
             </a:r>
           </a:p>
         </p:txBody>
@@ -10413,7 +10413,7 @@
                 </a:solidFill>
                 <a:latin typeface="Noto Sans CJK SC"/>
               </a:rPr>
-              <a:t>AI 相关条目 2,330 条（L1 2078/L2 138/L3 2196/L4 103/L5 25/L6 13）· KG 29,134 节点 58,471 边</a:t>
+              <a:t>AI 相关条目 2,949 条（L1 2649/L2 145/L3 2659/L4 125/L5 28/L6 14）· KG 52,844 节点 84,735 边</a:t>
             </a:r>
           </a:p>
         </p:txBody>
@@ -10552,7 +10552,7 @@
                 </a:solidFill>
                 <a:latin typeface="Noto Sans CJK SC"/>
               </a:rPr>
-              <a:t>① 大屏态势：41 源实时流入</a:t>
+              <a:t>① 值班台态势：41 源实时流入</a:t>
             </a:r>
           </a:p>
         </p:txBody>

--- a/docs/nereid-defense.pptx
+++ b/docs/nereid-defense.pptx
@@ -10478,7 +10478,7 @@
                 </a:solidFill>
                 <a:latin typeface="Noto Sans CJK SC"/>
               </a:rPr>
-              <a:t>场景演示</a:t>
+              <a:t>场景演示 · 系统实景</a:t>
             </a:r>
           </a:p>
           <a:p>
@@ -10501,290 +10501,291 @@
       </p:sp>
       <p:sp>
         <p:nvSpPr>
-          <p:cNvPr id="3" name="Rounded Rectangle 2"/>
-          <p:cNvSpPr/>
+          <p:cNvPr id="3" name="TextBox 2"/>
+          <p:cNvSpPr txBox="1"/>
           <p:nvPr/>
         </p:nvSpPr>
         <p:spPr>
           <a:xfrm>
-            <a:off x="800000" y="1500000"/>
-            <a:ext cx="10600000" cy="800000"/>
+            <a:off x="450000" y="1150000"/>
+            <a:ext cx="5500000" cy="240000"/>
           </a:xfrm>
-          <a:prstGeom prst="roundRect">
+          <a:prstGeom prst="rect">
             <a:avLst/>
           </a:prstGeom>
-          <a:solidFill>
-            <a:srgbClr val="121E33"/>
-          </a:solidFill>
-          <a:ln w="9525">
-            <a:solidFill>
-              <a:srgbClr val="243B5C"/>
-            </a:solidFill>
-          </a:ln>
+          <a:noFill/>
         </p:spPr>
-        <p:style>
-          <a:lnRef idx="1">
-            <a:schemeClr val="accent1"/>
-          </a:lnRef>
-          <a:fillRef idx="3">
-            <a:schemeClr val="accent1"/>
-          </a:fillRef>
-          <a:effectRef idx="2">
-            <a:schemeClr val="accent1"/>
-          </a:effectRef>
-          <a:fontRef idx="minor">
-            <a:schemeClr val="lt1"/>
-          </a:fontRef>
-        </p:style>
-        <p:txBody>
-          <a:bodyPr rtlCol="0" anchor="ctr" wrap="square" lIns="120000" tIns="80000"/>
+        <p:txBody>
+          <a:bodyPr wrap="square">
+            <a:spAutoFit/>
+          </a:bodyPr>
           <a:lstStyle/>
           <a:p>
-            <a:pPr algn="ctr">
+            <a:pPr>
               <a:spcAft>
                 <a:spcPts val="400"/>
               </a:spcAft>
             </a:pPr>
             <a:r>
-              <a:rPr sz="1400" b="1">
-                <a:solidFill>
-                  <a:srgbClr val="38BDF8"/>
-                </a:solidFill>
-                <a:latin typeface="Noto Sans CJK SC"/>
-              </a:rPr>
-              <a:t>① 值班台态势：41 源实时流入</a:t>
-            </a:r>
-          </a:p>
-        </p:txBody>
-      </p:sp>
-      <p:sp>
-        <p:nvSpPr>
-          <p:cNvPr id="4" name="Rounded Rectangle 3"/>
-          <p:cNvSpPr/>
+              <a:rPr sz="1000" b="1">
+                <a:solidFill>
+                  <a:srgbClr val="34D399"/>
+                </a:solidFill>
+                <a:latin typeface="Noto Sans CJK SC"/>
+              </a:rPr>
+              <a:t>今日值班台 · 待复核/高优/KEV 队列 + 实时流</a:t>
+            </a:r>
+          </a:p>
+        </p:txBody>
+      </p:sp>
+      <p:pic>
+        <p:nvPicPr>
+          <p:cNvPr id="4" name="Picture 3" descr="01-duty.png"/>
+          <p:cNvPicPr>
+            <a:picLocks noChangeAspect="1"/>
+          </p:cNvPicPr>
           <p:nvPr/>
-        </p:nvSpPr>
+        </p:nvPicPr>
+        <p:blipFill>
+          <a:blip r:embed="rId2"/>
+          <a:stretch>
+            <a:fillRect/>
+          </a:stretch>
+        </p:blipFill>
         <p:spPr>
           <a:xfrm>
-            <a:off x="800000" y="2450000"/>
-            <a:ext cx="10600000" cy="800000"/>
+            <a:off x="450000" y="1390000"/>
+            <a:ext cx="5500000" cy="3094000"/>
           </a:xfrm>
-          <a:prstGeom prst="roundRect">
+          <a:prstGeom prst="rect">
             <a:avLst/>
           </a:prstGeom>
-          <a:solidFill>
-            <a:srgbClr val="121E33"/>
-          </a:solidFill>
-          <a:ln w="9525">
-            <a:solidFill>
-              <a:srgbClr val="243B5C"/>
-            </a:solidFill>
-          </a:ln>
         </p:spPr>
-        <p:style>
-          <a:lnRef idx="1">
-            <a:schemeClr val="accent1"/>
-          </a:lnRef>
-          <a:fillRef idx="3">
-            <a:schemeClr val="accent1"/>
-          </a:fillRef>
-          <a:effectRef idx="2">
-            <a:schemeClr val="accent1"/>
-          </a:effectRef>
-          <a:fontRef idx="minor">
-            <a:schemeClr val="lt1"/>
-          </a:fontRef>
-        </p:style>
-        <p:txBody>
-          <a:bodyPr rtlCol="0" anchor="ctr" wrap="square" lIns="120000" tIns="80000"/>
-          <a:lstStyle/>
-          <a:p>
-            <a:pPr algn="ctr">
-              <a:spcAft>
-                <a:spcPts val="400"/>
-              </a:spcAft>
-            </a:pPr>
-            <a:r>
-              <a:rPr sz="1400" b="1">
-                <a:solidFill>
-                  <a:srgbClr val="38BDF8"/>
-                </a:solidFill>
-                <a:latin typeface="Noto Sans CJK SC"/>
-              </a:rPr>
-              <a:t>② 新 CVE 入库：15min 增量</a:t>
-            </a:r>
-          </a:p>
-        </p:txBody>
-      </p:sp>
-      <p:sp>
-        <p:nvSpPr>
-          <p:cNvPr id="5" name="Rounded Rectangle 4"/>
-          <p:cNvSpPr/>
+      </p:pic>
+      <p:sp>
+        <p:nvSpPr>
+          <p:cNvPr id="5" name="TextBox 4"/>
+          <p:cNvSpPr txBox="1"/>
           <p:nvPr/>
         </p:nvSpPr>
         <p:spPr>
           <a:xfrm>
-            <a:off x="800000" y="3400000"/>
-            <a:ext cx="10600000" cy="800000"/>
+            <a:off x="6250000" y="1150000"/>
+            <a:ext cx="5500000" cy="240000"/>
           </a:xfrm>
-          <a:prstGeom prst="roundRect">
+          <a:prstGeom prst="rect">
             <a:avLst/>
           </a:prstGeom>
-          <a:solidFill>
-            <a:srgbClr val="121E33"/>
-          </a:solidFill>
-          <a:ln w="9525">
-            <a:solidFill>
-              <a:srgbClr val="243B5C"/>
-            </a:solidFill>
-          </a:ln>
+          <a:noFill/>
         </p:spPr>
-        <p:style>
-          <a:lnRef idx="1">
-            <a:schemeClr val="accent1"/>
-          </a:lnRef>
-          <a:fillRef idx="3">
-            <a:schemeClr val="accent1"/>
-          </a:fillRef>
-          <a:effectRef idx="2">
-            <a:schemeClr val="accent1"/>
-          </a:effectRef>
-          <a:fontRef idx="minor">
-            <a:schemeClr val="lt1"/>
-          </a:fontRef>
-        </p:style>
-        <p:txBody>
-          <a:bodyPr rtlCol="0" anchor="ctr" wrap="square" lIns="120000" tIns="80000"/>
+        <p:txBody>
+          <a:bodyPr wrap="square">
+            <a:spAutoFit/>
+          </a:bodyPr>
           <a:lstStyle/>
           <a:p>
-            <a:pPr algn="ctr">
+            <a:pPr>
               <a:spcAft>
                 <a:spcPts val="400"/>
               </a:spcAft>
             </a:pPr>
             <a:r>
-              <a:rPr sz="1400" b="1">
-                <a:solidFill>
-                  <a:srgbClr val="38BDF8"/>
-                </a:solidFill>
-                <a:latin typeface="Noto Sans CJK SC"/>
-              </a:rPr>
-              <a:t>③ 富化情报卡：8 worker 并发全景</a:t>
-            </a:r>
-          </a:p>
-        </p:txBody>
-      </p:sp>
-      <p:sp>
-        <p:nvSpPr>
-          <p:cNvPr id="6" name="Rounded Rectangle 5"/>
-          <p:cNvSpPr/>
+              <a:rPr sz="1000" b="1">
+                <a:solidFill>
+                  <a:srgbClr val="34D399"/>
+                </a:solidFill>
+                <a:latin typeface="Noto Sans CJK SC"/>
+              </a:rPr>
+              <a:t>情报卡 · 评分溯源/富化维度/标识符</a:t>
+            </a:r>
+          </a:p>
+        </p:txBody>
+      </p:sp>
+      <p:pic>
+        <p:nvPicPr>
+          <p:cNvPr id="6" name="Picture 5" descr="03-item-detail.png"/>
+          <p:cNvPicPr>
+            <a:picLocks noChangeAspect="1"/>
+          </p:cNvPicPr>
           <p:nvPr/>
-        </p:nvSpPr>
+        </p:nvPicPr>
+        <p:blipFill>
+          <a:blip r:embed="rId3"/>
+          <a:stretch>
+            <a:fillRect/>
+          </a:stretch>
+        </p:blipFill>
         <p:spPr>
           <a:xfrm>
-            <a:off x="800000" y="4350000"/>
-            <a:ext cx="10600000" cy="800000"/>
+            <a:off x="6250000" y="1390000"/>
+            <a:ext cx="5500000" cy="3094000"/>
           </a:xfrm>
-          <a:prstGeom prst="roundRect">
+          <a:prstGeom prst="rect">
             <a:avLst/>
           </a:prstGeom>
-          <a:solidFill>
-            <a:srgbClr val="121E33"/>
-          </a:solidFill>
-          <a:ln w="9525">
-            <a:solidFill>
-              <a:srgbClr val="243B5C"/>
-            </a:solidFill>
-          </a:ln>
         </p:spPr>
-        <p:style>
-          <a:lnRef idx="1">
-            <a:schemeClr val="accent1"/>
-          </a:lnRef>
-          <a:fillRef idx="3">
-            <a:schemeClr val="accent1"/>
-          </a:fillRef>
-          <a:effectRef idx="2">
-            <a:schemeClr val="accent1"/>
-          </a:effectRef>
-          <a:fontRef idx="minor">
-            <a:schemeClr val="lt1"/>
-          </a:fontRef>
-        </p:style>
-        <p:txBody>
-          <a:bodyPr rtlCol="0" anchor="ctr" wrap="square" lIns="120000" tIns="80000"/>
-          <a:lstStyle/>
-          <a:p>
-            <a:pPr algn="ctr">
-              <a:spcAft>
-                <a:spcPts val="400"/>
-              </a:spcAft>
-            </a:pPr>
-            <a:r>
-              <a:rPr sz="1400" b="1">
-                <a:solidFill>
-                  <a:srgbClr val="38BDF8"/>
-                </a:solidFill>
-                <a:latin typeface="Noto Sans CJK SC"/>
-              </a:rPr>
-              <a:t>④ 内网风险问答：多跳推理+引用</a:t>
-            </a:r>
-          </a:p>
-        </p:txBody>
-      </p:sp>
-      <p:sp>
-        <p:nvSpPr>
-          <p:cNvPr id="7" name="Rounded Rectangle 6"/>
-          <p:cNvSpPr/>
+      </p:pic>
+      <p:sp>
+        <p:nvSpPr>
+          <p:cNvPr id="7" name="TextBox 6"/>
+          <p:cNvSpPr txBox="1"/>
           <p:nvPr/>
         </p:nvSpPr>
         <p:spPr>
           <a:xfrm>
-            <a:off x="800000" y="5300000"/>
-            <a:ext cx="10600000" cy="800000"/>
+            <a:off x="450000" y="4150000"/>
+            <a:ext cx="5500000" cy="240000"/>
           </a:xfrm>
-          <a:prstGeom prst="roundRect">
+          <a:prstGeom prst="rect">
             <a:avLst/>
           </a:prstGeom>
-          <a:solidFill>
-            <a:srgbClr val="121E33"/>
-          </a:solidFill>
-          <a:ln w="9525">
-            <a:solidFill>
-              <a:srgbClr val="243B5C"/>
-            </a:solidFill>
-          </a:ln>
+          <a:noFill/>
         </p:spPr>
-        <p:style>
-          <a:lnRef idx="1">
-            <a:schemeClr val="accent1"/>
-          </a:lnRef>
-          <a:fillRef idx="3">
-            <a:schemeClr val="accent1"/>
-          </a:fillRef>
-          <a:effectRef idx="2">
-            <a:schemeClr val="accent1"/>
-          </a:effectRef>
-          <a:fontRef idx="minor">
-            <a:schemeClr val="lt1"/>
-          </a:fontRef>
-        </p:style>
-        <p:txBody>
-          <a:bodyPr rtlCol="0" anchor="ctr" wrap="square" lIns="120000" tIns="80000"/>
+        <p:txBody>
+          <a:bodyPr wrap="square">
+            <a:spAutoFit/>
+          </a:bodyPr>
           <a:lstStyle/>
           <a:p>
-            <a:pPr algn="ctr">
+            <a:pPr>
               <a:spcAft>
                 <a:spcPts val="400"/>
               </a:spcAft>
             </a:pPr>
             <a:r>
-              <a:rPr sz="1400" b="1">
-                <a:solidFill>
-                  <a:srgbClr val="38BDF8"/>
-                </a:solidFill>
-                <a:latin typeface="Noto Sans CJK SC"/>
-              </a:rPr>
-              <a:t>⑤ 为你推荐+自动日报：画像驱动</a:t>
+              <a:rPr sz="1000" b="1">
+                <a:solidFill>
+                  <a:srgbClr val="34D399"/>
+                </a:solidFill>
+                <a:latin typeface="Noto Sans CJK SC"/>
+              </a:rPr>
+              <a:t>深度问答 · 行内引用/推理链 13 步/证据面板</a:t>
+            </a:r>
+          </a:p>
+        </p:txBody>
+      </p:sp>
+      <p:pic>
+        <p:nvPicPr>
+          <p:cNvPr id="8" name="Picture 7" descr="10-qa-answer.png"/>
+          <p:cNvPicPr>
+            <a:picLocks noChangeAspect="1"/>
+          </p:cNvPicPr>
+          <p:nvPr/>
+        </p:nvPicPr>
+        <p:blipFill>
+          <a:blip r:embed="rId4"/>
+          <a:stretch>
+            <a:fillRect/>
+          </a:stretch>
+        </p:blipFill>
+        <p:spPr>
+          <a:xfrm>
+            <a:off x="450000" y="4390000"/>
+            <a:ext cx="5500000" cy="3094000"/>
+          </a:xfrm>
+          <a:prstGeom prst="rect">
+            <a:avLst/>
+          </a:prstGeom>
+        </p:spPr>
+      </p:pic>
+      <p:sp>
+        <p:nvSpPr>
+          <p:cNvPr id="9" name="TextBox 8"/>
+          <p:cNvSpPr txBox="1"/>
+          <p:nvPr/>
+        </p:nvSpPr>
+        <p:spPr>
+          <a:xfrm>
+            <a:off x="6250000" y="4150000"/>
+            <a:ext cx="5500000" cy="240000"/>
+          </a:xfrm>
+          <a:prstGeom prst="rect">
+            <a:avLst/>
+          </a:prstGeom>
+          <a:noFill/>
+        </p:spPr>
+        <p:txBody>
+          <a:bodyPr wrap="square">
+            <a:spAutoFit/>
+          </a:bodyPr>
+          <a:lstStyle/>
+          <a:p>
+            <a:pPr>
+              <a:spcAft>
+                <a:spcPts val="400"/>
+              </a:spcAft>
+            </a:pPr>
+            <a:r>
+              <a:rPr sz="1000" b="1">
+                <a:solidFill>
+                  <a:srgbClr val="34D399"/>
+                </a:solidFill>
+                <a:latin typeface="Noto Sans CJK SC"/>
+              </a:rPr>
+              <a:t>HITL 复核队列 · 确认/回炉/重富化/撤销</a:t>
+            </a:r>
+          </a:p>
+        </p:txBody>
+      </p:sp>
+      <p:pic>
+        <p:nvPicPr>
+          <p:cNvPr id="10" name="Picture 9" descr="04-review.png"/>
+          <p:cNvPicPr>
+            <a:picLocks noChangeAspect="1"/>
+          </p:cNvPicPr>
+          <p:nvPr/>
+        </p:nvPicPr>
+        <p:blipFill>
+          <a:blip r:embed="rId5"/>
+          <a:stretch>
+            <a:fillRect/>
+          </a:stretch>
+        </p:blipFill>
+        <p:spPr>
+          <a:xfrm>
+            <a:off x="6250000" y="4390000"/>
+            <a:ext cx="5500000" cy="3094000"/>
+          </a:xfrm>
+          <a:prstGeom prst="rect">
+            <a:avLst/>
+          </a:prstGeom>
+        </p:spPr>
+      </p:pic>
+      <p:sp>
+        <p:nvSpPr>
+          <p:cNvPr id="11" name="TextBox 10"/>
+          <p:cNvSpPr txBox="1"/>
+          <p:nvPr/>
+        </p:nvSpPr>
+        <p:spPr>
+          <a:xfrm>
+            <a:off x="450000" y="6600000"/>
+            <a:ext cx="11300000" cy="260000"/>
+          </a:xfrm>
+          <a:prstGeom prst="rect">
+            <a:avLst/>
+          </a:prstGeom>
+          <a:noFill/>
+        </p:spPr>
+        <p:txBody>
+          <a:bodyPr wrap="square">
+            <a:spAutoFit/>
+          </a:bodyPr>
+          <a:lstStyle/>
+          <a:p>
+            <a:pPr>
+              <a:spcAft>
+                <a:spcPts val="400"/>
+              </a:spcAft>
+            </a:pPr>
+            <a:r>
+              <a:rPr sz="1100" b="0">
+                <a:solidFill>
+                  <a:srgbClr val="9AB0C8"/>
+                </a:solidFill>
+                <a:latin typeface="Noto Sans CJK SC"/>
+              </a:rPr>
+              <a:t>演示流：值班台态势 → 新 CVE 15min 入库 → 8 worker 富化全景 → 多跳问答带引用 → 画像推荐+日报</a:t>
             </a:r>
           </a:p>
         </p:txBody>
